--- a/ppttemplate/template1.pptx
+++ b/ppttemplate/template1.pptx
@@ -7734,8 +7734,8 @@
         </p:nvSpPr>
         <p:spPr>
           <a:xfrm flipH="1">
-            <a:off x="4896036" y="2840636"/>
-            <a:ext cx="3287080" cy="1107996"/>
+            <a:off x="4895850" y="2840355"/>
+            <a:ext cx="3630930" cy="1106805"/>
           </a:xfrm>
           <a:prstGeom prst="rect">
             <a:avLst/>
